--- a/optimization/mean_variance_optimization.pptx
+++ b/optimization/mean_variance_optimization.pptx
@@ -16,6 +16,7 @@
     <p:sldId id="264" r:id="rId15"/>
     <p:sldId id="265" r:id="rId16"/>
     <p:sldId id="266" r:id="rId17"/>
+    <p:sldId id="267" r:id="rId18"/>
   </p:sldIdLst>
   <p:sldSz cx="12191695" cy="6858000" type="screen4x3"/>
   <p:notesSz cx="6858000" cy="9144000"/>
@@ -3419,7 +3420,7 @@
                 </a:solidFill>
                 <a:latin typeface="Calibri"/>
               </a:rPr>
-              <a:t>Caveats and extensions</a:t>
+              <a:t>DebtFrontierInputs — the editable entry point</a:t>
             </a:r>
           </a:p>
         </p:txBody>
@@ -3453,7 +3454,7 @@
                 </a:solidFill>
                 <a:latin typeface="Calibri"/>
               </a:rPr>
-              <a:t>What to know before pushing this further</a:t>
+              <a:t>Dataclass wrapping covariance + assumptions, with a widget</a:t>
             </a:r>
           </a:p>
         </p:txBody>
@@ -3467,7 +3468,119 @@
         <p:spPr>
           <a:xfrm>
             <a:off x="548640" y="1188720"/>
-            <a:ext cx="10972800" cy="5029200"/>
+            <a:ext cx="10972800" cy="457200"/>
+          </a:xfrm>
+          <a:prstGeom prst="rect">
+            <a:avLst/>
+          </a:prstGeom>
+          <a:noFill/>
+        </p:spPr>
+        <p:txBody>
+          <a:bodyPr wrap="square" lIns="45720" rIns="45720">
+            <a:spAutoFit/>
+          </a:bodyPr>
+          <a:lstStyle/>
+          <a:p>
+            <a:r>
+              <a:rPr sz="1800" b="1">
+                <a:solidFill>
+                  <a:srgbClr val="0B2E4F"/>
+                </a:solidFill>
+                <a:latin typeface="Calibri"/>
+              </a:rPr>
+              <a:t>Construct, edit, solve, plot:</a:t>
+            </a:r>
+          </a:p>
+        </p:txBody>
+      </p:sp>
+      <p:sp>
+        <p:nvSpPr>
+          <p:cNvPr id="7" name="TextBox 6"/>
+          <p:cNvSpPr txBox="1"/>
+          <p:nvPr/>
+        </p:nvSpPr>
+        <p:spPr>
+          <a:xfrm>
+            <a:off x="731520" y="1737360"/>
+            <a:ext cx="10515600" cy="1828800"/>
+          </a:xfrm>
+          <a:prstGeom prst="rect">
+            <a:avLst/>
+          </a:prstGeom>
+          <a:noFill/>
+        </p:spPr>
+        <p:txBody>
+          <a:bodyPr wrap="square">
+            <a:spAutoFit/>
+          </a:bodyPr>
+          <a:lstStyle/>
+          <a:p>
+            <a:r>
+              <a:rPr sz="1600">
+                <a:solidFill>
+                  <a:srgbClr val="0B2E4F"/>
+                </a:solidFill>
+                <a:latin typeface="Consolas"/>
+              </a:rPr>
+              <a:t>inp = er.DebtFrontierInputs(cov_df=cov_df, assumptions=assumptions,</a:t>
+            </a:r>
+          </a:p>
+          <a:p>
+            <a:r>
+              <a:rPr sz="1600">
+                <a:solidFill>
+                  <a:srgbClr val="0B2E4F"/>
+                </a:solidFill>
+                <a:latin typeface="Consolas"/>
+              </a:rPr>
+              <a:t>                            name='basis', chartfolder='graph/')</a:t>
+            </a:r>
+          </a:p>
+          <a:p>
+            <a:r>
+              <a:rPr sz="1600">
+                <a:solidFill>
+                  <a:srgbClr val="0B2E4F"/>
+                </a:solidFill>
+                <a:latin typeface="Consolas"/>
+              </a:rPr>
+              <a:t>inp.widget()                  # interactive grid in a notebook</a:t>
+            </a:r>
+          </a:p>
+          <a:p>
+            <a:r>
+              <a:rPr sz="1600">
+                <a:solidFill>
+                  <a:srgbClr val="0B2E4F"/>
+                </a:solidFill>
+                <a:latin typeface="Consolas"/>
+              </a:rPr>
+              <a:t>inp.solve()                   # 102-row DataFrame (row 0 = current)</a:t>
+            </a:r>
+          </a:p>
+          <a:p>
+            <a:r>
+              <a:rPr sz="1600">
+                <a:solidFill>
+                  <a:srgbClr val="0B2E4F"/>
+                </a:solidFill>
+                <a:latin typeface="Consolas"/>
+              </a:rPr>
+              <a:t>inp.plot()                    # writes graph/basis.svg</a:t>
+            </a:r>
+          </a:p>
+        </p:txBody>
+      </p:sp>
+      <p:sp>
+        <p:nvSpPr>
+          <p:cNvPr id="8" name="TextBox 7"/>
+          <p:cNvSpPr txBox="1"/>
+          <p:nvPr/>
+        </p:nvSpPr>
+        <p:spPr>
+          <a:xfrm>
+            <a:off x="548640" y="3840480"/>
+            <a:ext cx="10972800" cy="2743200"/>
           </a:xfrm>
           <a:prstGeom prst="rect">
             <a:avLst/>
@@ -3492,7 +3605,7 @@
                 </a:solidFill>
                 <a:latin typeface="Calibri"/>
               </a:rPr>
-              <a:t>•  Historical covariance is backward-looking. FX regimes shift — stress with alternative Σ (e.g. crisis-period covariance).</a:t>
+              <a:t>•  Loop scenarios by mutating inp.assumptions['interest_rate'] and setting inp.name before each plot().</a:t>
             </a:r>
           </a:p>
           <a:p>
@@ -3508,7 +3621,7 @@
                 </a:solidFill>
                 <a:latin typeface="Calibri"/>
               </a:rPr>
-              <a:t>•  Expected appreciation defaults to 0 in the worked example. Provide a view (forwards, UIP, model output) for production use.</a:t>
+              <a:t>•  Live Σ current_share indicator in the widget turns green at exactly 1.0.</a:t>
             </a:r>
           </a:p>
           <a:p>
@@ -3524,55 +3637,7 @@
                 </a:solidFill>
                 <a:latin typeface="Calibri"/>
               </a:rPr>
-              <a:t>•  Add constraints via the weights / weigthtedsum slots of mv_opt (note the upstream typo). E.g. domestic-share floor, regional caps.</a:t>
-            </a:r>
-          </a:p>
-          <a:p>
-            <a:pPr>
-              <a:spcAft>
-                <a:spcPts val="800"/>
-              </a:spcAft>
-            </a:pPr>
-            <a:r>
-              <a:rPr sz="1600">
-                <a:solidFill>
-                  <a:srgbClr val="0B2E4F"/>
-                </a:solidFill>
-                <a:latin typeface="Calibri"/>
-              </a:rPr>
-              <a:t>•  n_points=101 is fast (&lt;1s for 5 assets). Bump for smoother lines; cost is linear.</a:t>
-            </a:r>
-          </a:p>
-          <a:p>
-            <a:pPr>
-              <a:spcAft>
-                <a:spcPts val="800"/>
-              </a:spcAft>
-            </a:pPr>
-            <a:r>
-              <a:rPr sz="1600">
-                <a:solidFill>
-                  <a:srgbClr val="0B2E4F"/>
-                </a:solidFill>
-                <a:latin typeface="Calibri"/>
-              </a:rPr>
-              <a:t>•  Yields here are debt cost, not asset return. Don’t rename the result column — plotter labels are hardcoded.</a:t>
-            </a:r>
-          </a:p>
-          <a:p>
-            <a:pPr>
-              <a:spcAft>
-                <a:spcPts val="800"/>
-              </a:spcAft>
-            </a:pPr>
-            <a:r>
-              <a:rPr sz="1600">
-                <a:solidFill>
-                  <a:srgbClr val="0B2E4F"/>
-                </a:solidFill>
-                <a:latin typeface="Calibri"/>
-              </a:rPr>
-              <a:t>•  External dep: mv_opt comes from model_cvx, bundled with ModelFlowIb (not on PyPI).</a:t>
+              <a:t>•  Default export is SVG only; pass export_formats=('png','pdf','svg') to override.</a:t>
             </a:r>
           </a:p>
         </p:txBody>
@@ -3586,6 +3651,297 @@
 </file>
 
 <file path=ppt/slides/slide11.xml><?xml version="1.0" encoding="utf-8"?>
+<p:sld xmlns:a="http://schemas.openxmlformats.org/drawingml/2006/main" xmlns:p="http://schemas.openxmlformats.org/presentationml/2006/main" xmlns:r="http://schemas.openxmlformats.org/officeDocument/2006/relationships">
+  <p:cSld>
+    <p:spTree>
+      <p:nvGrpSpPr>
+        <p:cNvPr id="1" name=""/>
+        <p:cNvGrpSpPr/>
+        <p:nvPr/>
+      </p:nvGrpSpPr>
+      <p:grpSpPr/>
+      <p:sp>
+        <p:nvSpPr>
+          <p:cNvPr id="2" name="Rectangle 1"/>
+          <p:cNvSpPr/>
+          <p:nvPr/>
+        </p:nvSpPr>
+        <p:spPr>
+          <a:xfrm>
+            <a:off x="0" y="0"/>
+            <a:ext cx="12191695" cy="6858000"/>
+          </a:xfrm>
+          <a:prstGeom prst="rect">
+            <a:avLst/>
+          </a:prstGeom>
+          <a:solidFill>
+            <a:srgbClr val="FFFFFF"/>
+          </a:solidFill>
+          <a:ln>
+            <a:noFill/>
+          </a:ln>
+        </p:spPr>
+        <p:style>
+          <a:lnRef idx="1">
+            <a:schemeClr val="accent1"/>
+          </a:lnRef>
+          <a:fillRef idx="3">
+            <a:schemeClr val="accent1"/>
+          </a:fillRef>
+          <a:effectRef idx="2">
+            <a:schemeClr val="accent1"/>
+          </a:effectRef>
+          <a:fontRef idx="minor">
+            <a:schemeClr val="lt1"/>
+          </a:fontRef>
+        </p:style>
+        <p:txBody>
+          <a:bodyPr rtlCol="0" anchor="ctr"/>
+          <a:lstStyle/>
+          <a:p>
+            <a:pPr algn="ctr"/>
+          </a:p>
+        </p:txBody>
+      </p:sp>
+      <p:sp>
+        <p:nvSpPr>
+          <p:cNvPr id="3" name="Rectangle 2"/>
+          <p:cNvSpPr/>
+          <p:nvPr/>
+        </p:nvSpPr>
+        <p:spPr>
+          <a:xfrm>
+            <a:off x="0" y="0"/>
+            <a:ext cx="12191695" cy="914400"/>
+          </a:xfrm>
+          <a:prstGeom prst="rect">
+            <a:avLst/>
+          </a:prstGeom>
+          <a:solidFill>
+            <a:srgbClr val="0B2E4F"/>
+          </a:solidFill>
+          <a:ln>
+            <a:noFill/>
+          </a:ln>
+        </p:spPr>
+        <p:style>
+          <a:lnRef idx="1">
+            <a:schemeClr val="accent1"/>
+          </a:lnRef>
+          <a:fillRef idx="3">
+            <a:schemeClr val="accent1"/>
+          </a:fillRef>
+          <a:effectRef idx="2">
+            <a:schemeClr val="accent1"/>
+          </a:effectRef>
+          <a:fontRef idx="minor">
+            <a:schemeClr val="lt1"/>
+          </a:fontRef>
+        </p:style>
+        <p:txBody>
+          <a:bodyPr rtlCol="0" anchor="ctr"/>
+          <a:lstStyle/>
+          <a:p>
+            <a:pPr algn="ctr"/>
+          </a:p>
+        </p:txBody>
+      </p:sp>
+      <p:sp>
+        <p:nvSpPr>
+          <p:cNvPr id="4" name="TextBox 3"/>
+          <p:cNvSpPr txBox="1"/>
+          <p:nvPr/>
+        </p:nvSpPr>
+        <p:spPr>
+          <a:xfrm>
+            <a:off x="457200" y="164592"/>
+            <a:ext cx="10972800" cy="502920"/>
+          </a:xfrm>
+          <a:prstGeom prst="rect">
+            <a:avLst/>
+          </a:prstGeom>
+          <a:noFill/>
+        </p:spPr>
+        <p:txBody>
+          <a:bodyPr wrap="square" lIns="45720" rIns="45720">
+            <a:spAutoFit/>
+          </a:bodyPr>
+          <a:lstStyle/>
+          <a:p>
+            <a:r>
+              <a:rPr sz="2800" b="1">
+                <a:solidFill>
+                  <a:srgbClr val="FFFFFF"/>
+                </a:solidFill>
+                <a:latin typeface="Calibri"/>
+              </a:rPr>
+              <a:t>Caveats and extensions</a:t>
+            </a:r>
+          </a:p>
+        </p:txBody>
+      </p:sp>
+      <p:sp>
+        <p:nvSpPr>
+          <p:cNvPr id="5" name="TextBox 4"/>
+          <p:cNvSpPr txBox="1"/>
+          <p:nvPr/>
+        </p:nvSpPr>
+        <p:spPr>
+          <a:xfrm>
+            <a:off x="457200" y="566928"/>
+            <a:ext cx="10972800" cy="320040"/>
+          </a:xfrm>
+          <a:prstGeom prst="rect">
+            <a:avLst/>
+          </a:prstGeom>
+          <a:noFill/>
+        </p:spPr>
+        <p:txBody>
+          <a:bodyPr wrap="square" lIns="45720" rIns="45720">
+            <a:spAutoFit/>
+          </a:bodyPr>
+          <a:lstStyle/>
+          <a:p>
+            <a:r>
+              <a:rPr sz="1400" b="0">
+                <a:solidFill>
+                  <a:srgbClr val="CCD6E0"/>
+                </a:solidFill>
+                <a:latin typeface="Calibri"/>
+              </a:rPr>
+              <a:t>What to know before pushing this further</a:t>
+            </a:r>
+          </a:p>
+        </p:txBody>
+      </p:sp>
+      <p:sp>
+        <p:nvSpPr>
+          <p:cNvPr id="6" name="TextBox 5"/>
+          <p:cNvSpPr txBox="1"/>
+          <p:nvPr/>
+        </p:nvSpPr>
+        <p:spPr>
+          <a:xfrm>
+            <a:off x="548640" y="1188720"/>
+            <a:ext cx="10972800" cy="5029200"/>
+          </a:xfrm>
+          <a:prstGeom prst="rect">
+            <a:avLst/>
+          </a:prstGeom>
+          <a:noFill/>
+        </p:spPr>
+        <p:txBody>
+          <a:bodyPr wrap="square">
+            <a:spAutoFit/>
+          </a:bodyPr>
+          <a:lstStyle/>
+          <a:p>
+            <a:pPr>
+              <a:spcAft>
+                <a:spcPts val="800"/>
+              </a:spcAft>
+            </a:pPr>
+            <a:r>
+              <a:rPr sz="1600">
+                <a:solidFill>
+                  <a:srgbClr val="0B2E4F"/>
+                </a:solidFill>
+                <a:latin typeface="Calibri"/>
+              </a:rPr>
+              <a:t>•  Historical covariance is backward-looking. FX regimes shift — stress with alternative Σ (e.g. crisis-period covariance).</a:t>
+            </a:r>
+          </a:p>
+          <a:p>
+            <a:pPr>
+              <a:spcAft>
+                <a:spcPts val="800"/>
+              </a:spcAft>
+            </a:pPr>
+            <a:r>
+              <a:rPr sz="1600">
+                <a:solidFill>
+                  <a:srgbClr val="0B2E4F"/>
+                </a:solidFill>
+                <a:latin typeface="Calibri"/>
+              </a:rPr>
+              <a:t>•  Expected appreciation defaults to 0 in the worked example. Provide a view (forwards, UIP, model output) for production use.</a:t>
+            </a:r>
+          </a:p>
+          <a:p>
+            <a:pPr>
+              <a:spcAft>
+                <a:spcPts val="800"/>
+              </a:spcAft>
+            </a:pPr>
+            <a:r>
+              <a:rPr sz="1600">
+                <a:solidFill>
+                  <a:srgbClr val="0B2E4F"/>
+                </a:solidFill>
+                <a:latin typeface="Calibri"/>
+              </a:rPr>
+              <a:t>•  Add constraints via the weights / weigthtedsum slots of mv_opt (note the upstream typo). E.g. domestic-share floor, regional caps.</a:t>
+            </a:r>
+          </a:p>
+          <a:p>
+            <a:pPr>
+              <a:spcAft>
+                <a:spcPts val="800"/>
+              </a:spcAft>
+            </a:pPr>
+            <a:r>
+              <a:rPr sz="1600">
+                <a:solidFill>
+                  <a:srgbClr val="0B2E4F"/>
+                </a:solidFill>
+                <a:latin typeface="Calibri"/>
+              </a:rPr>
+              <a:t>•  n_points=101 is fast (&lt;1s for 5 assets). Bump for smoother lines; cost is linear.</a:t>
+            </a:r>
+          </a:p>
+          <a:p>
+            <a:pPr>
+              <a:spcAft>
+                <a:spcPts val="800"/>
+              </a:spcAft>
+            </a:pPr>
+            <a:r>
+              <a:rPr sz="1600">
+                <a:solidFill>
+                  <a:srgbClr val="0B2E4F"/>
+                </a:solidFill>
+                <a:latin typeface="Calibri"/>
+              </a:rPr>
+              <a:t>•  Yields here are debt cost, not asset return. Don’t rename the result column — plotter labels are hardcoded.</a:t>
+            </a:r>
+          </a:p>
+          <a:p>
+            <a:pPr>
+              <a:spcAft>
+                <a:spcPts val="800"/>
+              </a:spcAft>
+            </a:pPr>
+            <a:r>
+              <a:rPr sz="1600">
+                <a:solidFill>
+                  <a:srgbClr val="0B2E4F"/>
+                </a:solidFill>
+                <a:latin typeface="Calibri"/>
+              </a:rPr>
+              <a:t>•  External dep: mv_opt comes from model_cvx, bundled with ModelFlowIb (not on PyPI).</a:t>
+            </a:r>
+          </a:p>
+        </p:txBody>
+      </p:sp>
+    </p:spTree>
+  </p:cSld>
+  <p:clrMapOvr>
+    <a:masterClrMapping/>
+  </p:clrMapOvr>
+</p:sld>
+</file>
+
+<file path=ppt/slides/slide12.xml><?xml version="1.0" encoding="utf-8"?>
 <p:sld xmlns:a="http://schemas.openxmlformats.org/drawingml/2006/main" xmlns:p="http://schemas.openxmlformats.org/presentationml/2006/main" xmlns:r="http://schemas.openxmlformats.org/officeDocument/2006/relationships">
   <p:cSld>
     <p:spTree>
@@ -8896,7 +9252,7 @@
                 </a:solidFill>
                 <a:latin typeface="Calibri"/>
               </a:rPr>
-              <a:t>Reading the three panels</a:t>
+              <a:t>Adding domestic debt to the choice set</a:t>
             </a:r>
           </a:p>
         </p:txBody>
@@ -8930,21 +9286,79 @@
                 </a:solidFill>
                 <a:latin typeface="Calibri"/>
               </a:rPr>
-              <a:t>What the plotter shows you</a:t>
-            </a:r>
-          </a:p>
-        </p:txBody>
-      </p:sp>
-      <p:sp>
-        <p:nvSpPr>
-          <p:cNvPr id="6" name="TextBox 5"/>
+              <a:t>A ZAR-denominated option:  zero FX risk, 5% interest rate (placeholder)</a:t>
+            </a:r>
+          </a:p>
+        </p:txBody>
+      </p:sp>
+      <p:pic>
+        <p:nvPicPr>
+          <p:cNvPr id="6" name="Picture 5" descr="zar_debt_frontier_with_domestic.png"/>
+          <p:cNvPicPr>
+            <a:picLocks noChangeAspect="1"/>
+          </p:cNvPicPr>
+          <p:nvPr/>
+        </p:nvPicPr>
+        <p:blipFill>
+          <a:blip r:embed="rId2"/>
+          <a:stretch>
+            <a:fillRect/>
+          </a:stretch>
+        </p:blipFill>
+        <p:spPr>
+          <a:xfrm>
+            <a:off x="365760" y="1097280"/>
+            <a:ext cx="3416186" cy="4572000"/>
+          </a:xfrm>
+          <a:prstGeom prst="rect">
+            <a:avLst/>
+          </a:prstGeom>
+        </p:spPr>
+      </p:pic>
+      <p:sp>
+        <p:nvSpPr>
+          <p:cNvPr id="7" name="TextBox 6"/>
           <p:cNvSpPr txBox="1"/>
           <p:nvPr/>
         </p:nvSpPr>
         <p:spPr>
           <a:xfrm>
-            <a:off x="548640" y="1188720"/>
-            <a:ext cx="10972800" cy="4572000"/>
+            <a:off x="7863840" y="1188720"/>
+            <a:ext cx="4114800" cy="457200"/>
+          </a:xfrm>
+          <a:prstGeom prst="rect">
+            <a:avLst/>
+          </a:prstGeom>
+          <a:noFill/>
+        </p:spPr>
+        <p:txBody>
+          <a:bodyPr wrap="square" lIns="45720" rIns="45720">
+            <a:spAutoFit/>
+          </a:bodyPr>
+          <a:lstStyle/>
+          <a:p>
+            <a:r>
+              <a:rPr sz="2000" b="1">
+                <a:solidFill>
+                  <a:srgbClr val="0B2E4F"/>
+                </a:solidFill>
+                <a:latin typeface="Calibri"/>
+              </a:rPr>
+              <a:t>What changes</a:t>
+            </a:r>
+          </a:p>
+        </p:txBody>
+      </p:sp>
+      <p:sp>
+        <p:nvSpPr>
+          <p:cNvPr id="8" name="TextBox 7"/>
+          <p:cNvSpPr txBox="1"/>
+          <p:nvPr/>
+        </p:nvSpPr>
+        <p:spPr>
+          <a:xfrm>
+            <a:off x="7863840" y="1645920"/>
+            <a:ext cx="4114800" cy="4572000"/>
           </a:xfrm>
           <a:prstGeom prst="rect">
             <a:avLst/>
@@ -8963,13 +9377,13 @@
               </a:spcAft>
             </a:pPr>
             <a:r>
-              <a:rPr sz="1700">
+              <a:rPr sz="1300">
                 <a:solidFill>
                   <a:srgbClr val="0B2E4F"/>
                 </a:solidFill>
                 <a:latin typeface="Calibri"/>
               </a:rPr>
-              <a:t>•  Panel 1  —  cost vs risk:  the efficient frontier, plus the current portfolio marker. If the marker sits below-and-right of the frontier, there is a same-cost / lower-risk move available.</a:t>
+              <a:t>•  Extend cov_df with a ZAR row/column of zeros — domestic debt has no FX variance.</a:t>
             </a:r>
           </a:p>
           <a:p>
@@ -8979,13 +9393,13 @@
               </a:spcAft>
             </a:pPr>
             <a:r>
-              <a:rPr sz="1700">
+              <a:rPr sz="1300">
                 <a:solidFill>
                   <a:srgbClr val="0B2E4F"/>
                 </a:solidFill>
                 <a:latin typeface="Calibri"/>
               </a:rPr>
-              <a:t>•  Panel 2  —  funding shares as lines:  each currency’s optimal share as λ moves left (risk-averse) to right (cost-min).</a:t>
+              <a:t>•  Add a ZAR row to assumptions:  interest_rate = 5%,  current_share = 0.</a:t>
             </a:r>
           </a:p>
           <a:p>
@@ -8995,13 +9409,13 @@
               </a:spcAft>
             </a:pPr>
             <a:r>
-              <a:rPr sz="1700">
+              <a:rPr sz="1300">
                 <a:solidFill>
                   <a:srgbClr val="0B2E4F"/>
                 </a:solidFill>
                 <a:latin typeface="Calibri"/>
               </a:rPr>
-              <a:t>•  Panel 3  —  stacked area:  the same shares as a 100% composition view — easier to read the mix at any given risk-aversion level.</a:t>
+              <a:t>•  The QP now picks among 6 instruments — 5 foreign + 1 domestic.</a:t>
             </a:r>
           </a:p>
           <a:p>
@@ -9011,13 +9425,79 @@
               </a:spcAft>
             </a:pPr>
             <a:r>
-              <a:rPr sz="1700">
+              <a:rPr sz="1300">
                 <a:solidFill>
                   <a:srgbClr val="0B2E4F"/>
                 </a:solidFill>
                 <a:latin typeface="Calibri"/>
               </a:rPr>
-              <a:t>•  Row 0 of the result frame is the current composition (off the frontier). Rows 1..n_points are the frontier sweep.</a:t>
+              <a:t>•  Min-variance corner shifts to ~100% ZAR (riskless, but expensive).</a:t>
+            </a:r>
+          </a:p>
+          <a:p>
+            <a:pPr>
+              <a:spcAft>
+                <a:spcPts val="800"/>
+              </a:spcAft>
+            </a:pPr>
+            <a:r>
+              <a:rPr sz="1300">
+                <a:solidFill>
+                  <a:srgbClr val="0B2E4F"/>
+                </a:solidFill>
+                <a:latin typeface="Calibri"/>
+              </a:rPr>
+              <a:t>•  Min-cost corner is still the cheapest foreign currency, with FX risk.</a:t>
+            </a:r>
+          </a:p>
+          <a:p>
+            <a:pPr>
+              <a:spcAft>
+                <a:spcPts val="800"/>
+              </a:spcAft>
+            </a:pPr>
+            <a:r>
+              <a:rPr sz="1300">
+                <a:solidFill>
+                  <a:srgbClr val="0B2E4F"/>
+                </a:solidFill>
+                <a:latin typeface="Calibri"/>
+              </a:rPr>
+              <a:t>•  The widget auto-renders the extra ZAR row — no UI changes needed.</a:t>
+            </a:r>
+          </a:p>
+        </p:txBody>
+      </p:sp>
+      <p:sp>
+        <p:nvSpPr>
+          <p:cNvPr id="9" name="TextBox 8"/>
+          <p:cNvSpPr txBox="1"/>
+          <p:nvPr/>
+        </p:nvSpPr>
+        <p:spPr>
+          <a:xfrm>
+            <a:off x="365760" y="5852160"/>
+            <a:ext cx="10972800" cy="274320"/>
+          </a:xfrm>
+          <a:prstGeom prst="rect">
+            <a:avLst/>
+          </a:prstGeom>
+          <a:noFill/>
+        </p:spPr>
+        <p:txBody>
+          <a:bodyPr wrap="square" lIns="45720" rIns="45720">
+            <a:spAutoFit/>
+          </a:bodyPr>
+          <a:lstStyle/>
+          <a:p>
+            <a:r>
+              <a:rPr sz="1100" b="0">
+                <a:solidFill>
+                  <a:srgbClr val="555B66"/>
+                </a:solidFill>
+                <a:latin typeface="Calibri"/>
+              </a:rPr>
+              <a:t>Source: optimization/zar_debt_frontier_with_domestic.png  —  generated from the notebook’s additional-frontier cell</a:t>
             </a:r>
           </a:p>
         </p:txBody>
@@ -9155,7 +9635,7 @@
                 </a:solidFill>
                 <a:latin typeface="Calibri"/>
               </a:rPr>
-              <a:t>DebtFrontierInputs — the editable entry point</a:t>
+              <a:t>Reading the three panels</a:t>
             </a:r>
           </a:p>
         </p:txBody>
@@ -9189,7 +9669,7 @@
                 </a:solidFill>
                 <a:latin typeface="Calibri"/>
               </a:rPr>
-              <a:t>Dataclass wrapping covariance + assumptions, with a widget</a:t>
+              <a:t>What the plotter shows you</a:t>
             </a:r>
           </a:p>
         </p:txBody>
@@ -9203,119 +9683,7 @@
         <p:spPr>
           <a:xfrm>
             <a:off x="548640" y="1188720"/>
-            <a:ext cx="10972800" cy="457200"/>
-          </a:xfrm>
-          <a:prstGeom prst="rect">
-            <a:avLst/>
-          </a:prstGeom>
-          <a:noFill/>
-        </p:spPr>
-        <p:txBody>
-          <a:bodyPr wrap="square" lIns="45720" rIns="45720">
-            <a:spAutoFit/>
-          </a:bodyPr>
-          <a:lstStyle/>
-          <a:p>
-            <a:r>
-              <a:rPr sz="1800" b="1">
-                <a:solidFill>
-                  <a:srgbClr val="0B2E4F"/>
-                </a:solidFill>
-                <a:latin typeface="Calibri"/>
-              </a:rPr>
-              <a:t>Construct, edit, solve, plot:</a:t>
-            </a:r>
-          </a:p>
-        </p:txBody>
-      </p:sp>
-      <p:sp>
-        <p:nvSpPr>
-          <p:cNvPr id="7" name="TextBox 6"/>
-          <p:cNvSpPr txBox="1"/>
-          <p:nvPr/>
-        </p:nvSpPr>
-        <p:spPr>
-          <a:xfrm>
-            <a:off x="731520" y="1737360"/>
-            <a:ext cx="10515600" cy="1828800"/>
-          </a:xfrm>
-          <a:prstGeom prst="rect">
-            <a:avLst/>
-          </a:prstGeom>
-          <a:noFill/>
-        </p:spPr>
-        <p:txBody>
-          <a:bodyPr wrap="square">
-            <a:spAutoFit/>
-          </a:bodyPr>
-          <a:lstStyle/>
-          <a:p>
-            <a:r>
-              <a:rPr sz="1600">
-                <a:solidFill>
-                  <a:srgbClr val="0B2E4F"/>
-                </a:solidFill>
-                <a:latin typeface="Consolas"/>
-              </a:rPr>
-              <a:t>inp = er.DebtFrontierInputs(cov_df=cov_df, assumptions=assumptions,</a:t>
-            </a:r>
-          </a:p>
-          <a:p>
-            <a:r>
-              <a:rPr sz="1600">
-                <a:solidFill>
-                  <a:srgbClr val="0B2E4F"/>
-                </a:solidFill>
-                <a:latin typeface="Consolas"/>
-              </a:rPr>
-              <a:t>                            name='basis', chartfolder='graph/')</a:t>
-            </a:r>
-          </a:p>
-          <a:p>
-            <a:r>
-              <a:rPr sz="1600">
-                <a:solidFill>
-                  <a:srgbClr val="0B2E4F"/>
-                </a:solidFill>
-                <a:latin typeface="Consolas"/>
-              </a:rPr>
-              <a:t>inp.widget()                  # interactive grid in a notebook</a:t>
-            </a:r>
-          </a:p>
-          <a:p>
-            <a:r>
-              <a:rPr sz="1600">
-                <a:solidFill>
-                  <a:srgbClr val="0B2E4F"/>
-                </a:solidFill>
-                <a:latin typeface="Consolas"/>
-              </a:rPr>
-              <a:t>inp.solve()                   # 102-row DataFrame (row 0 = current)</a:t>
-            </a:r>
-          </a:p>
-          <a:p>
-            <a:r>
-              <a:rPr sz="1600">
-                <a:solidFill>
-                  <a:srgbClr val="0B2E4F"/>
-                </a:solidFill>
-                <a:latin typeface="Consolas"/>
-              </a:rPr>
-              <a:t>inp.plot()                    # writes graph/basis.svg</a:t>
-            </a:r>
-          </a:p>
-        </p:txBody>
-      </p:sp>
-      <p:sp>
-        <p:nvSpPr>
-          <p:cNvPr id="8" name="TextBox 7"/>
-          <p:cNvSpPr txBox="1"/>
-          <p:nvPr/>
-        </p:nvSpPr>
-        <p:spPr>
-          <a:xfrm>
-            <a:off x="548640" y="3840480"/>
-            <a:ext cx="10972800" cy="2743200"/>
+            <a:ext cx="10972800" cy="4572000"/>
           </a:xfrm>
           <a:prstGeom prst="rect">
             <a:avLst/>
@@ -9334,13 +9702,13 @@
               </a:spcAft>
             </a:pPr>
             <a:r>
-              <a:rPr sz="1600">
+              <a:rPr sz="1700">
                 <a:solidFill>
                   <a:srgbClr val="0B2E4F"/>
                 </a:solidFill>
                 <a:latin typeface="Calibri"/>
               </a:rPr>
-              <a:t>•  Loop scenarios by mutating inp.assumptions['interest_rate'] and setting inp.name before each plot().</a:t>
+              <a:t>•  Panel 1  —  cost vs risk:  the efficient frontier, plus the current portfolio marker. If the marker sits below-and-right of the frontier, there is a same-cost / lower-risk move available.</a:t>
             </a:r>
           </a:p>
           <a:p>
@@ -9350,13 +9718,13 @@
               </a:spcAft>
             </a:pPr>
             <a:r>
-              <a:rPr sz="1600">
+              <a:rPr sz="1700">
                 <a:solidFill>
                   <a:srgbClr val="0B2E4F"/>
                 </a:solidFill>
                 <a:latin typeface="Calibri"/>
               </a:rPr>
-              <a:t>•  Live Σ current_share indicator in the widget turns green at exactly 1.0.</a:t>
+              <a:t>•  Panel 2  —  funding shares as lines:  each currency’s optimal share as λ moves left (risk-averse) to right (cost-min).</a:t>
             </a:r>
           </a:p>
           <a:p>
@@ -9366,13 +9734,29 @@
               </a:spcAft>
             </a:pPr>
             <a:r>
-              <a:rPr sz="1600">
+              <a:rPr sz="1700">
                 <a:solidFill>
                   <a:srgbClr val="0B2E4F"/>
                 </a:solidFill>
                 <a:latin typeface="Calibri"/>
               </a:rPr>
-              <a:t>•  Default export is SVG only; pass export_formats=('png','pdf','svg') to override.</a:t>
+              <a:t>•  Panel 3  —  stacked area:  the same shares as a 100% composition view — easier to read the mix at any given risk-aversion level.</a:t>
+            </a:r>
+          </a:p>
+          <a:p>
+            <a:pPr>
+              <a:spcAft>
+                <a:spcPts val="800"/>
+              </a:spcAft>
+            </a:pPr>
+            <a:r>
+              <a:rPr sz="1700">
+                <a:solidFill>
+                  <a:srgbClr val="0B2E4F"/>
+                </a:solidFill>
+                <a:latin typeface="Calibri"/>
+              </a:rPr>
+              <a:t>•  Row 0 of the result frame is the current composition (off the frontier). Rows 1..n_points are the frontier sweep.</a:t>
             </a:r>
           </a:p>
         </p:txBody>
